--- a/content/decks/media-studies/media-studies-s1-lesson-08-representation-applied-to-your-own-product.pptx
+++ b/content/decks/media-studies/media-studies-s1-lesson-08-representation-applied-to-your-own-product.pptx
@@ -2284,7 +2284,7 @@
                 <a:ea typeface="Arial" pitchFamily="34" charset="-122"/>
                 <a:cs typeface="Arial" pitchFamily="34" charset="-120"/>
               </a:rPr>
-              <a:t>Absence is selective construction's quietest tool. Who never appears cannot complain. Run the inventory on your own product.</a:t>
+              <a:t>Who never appears cannot complain. Run the inventory on your own product: who is missing, and did you choose that or default to it?</a:t>
             </a:r>
             <a:endParaRPr lang="en-US" sz="1400" dirty="0"/>
           </a:p>
@@ -3577,7 +3577,7 @@
       </p:grpSpPr>
       <p:pic>
         <p:nvPicPr>
-          <p:cNvPr id="2" name="Image 0" descr="/private/tmp/claude-501/-Users-dogan-Documents-Vaults-Courses/a3a5132d-721f-4cd4-8ddd-e62e2b37b51b/scratchpad/img/crops/gardner-lincoln-mcclellan_a1777.jpg">    </p:cNvPr>
+          <p:cNvPr id="2" name="Image 0" descr="/Users/dogan/Documents/Vaults/Courses/wiki/classes/media-studies/decks/_build/img/crops/gardner-lincoln-mcclellan_a1777.jpg">    </p:cNvPr>
           <p:cNvPicPr>
             <a:picLocks noChangeAspect="1"/>
           </p:cNvPicPr>
@@ -4393,7 +4393,7 @@
                 <a:ea typeface="Arial" pitchFamily="34" charset="-122"/>
                 <a:cs typeface="Arial" pitchFamily="34" charset="-120"/>
               </a:rPr>
-              <a:t>The turn inward: my C1 product represents ... as ... . It will be interrogated all week.</a:t>
+              <a:t>The turn inward: my C1 product represents ... as ... . Every day this week tests that sentence.</a:t>
             </a:r>
             <a:endParaRPr lang="en-US" sz="1250" dirty="0"/>
           </a:p>
@@ -5015,20 +5015,23 @@
         </p:nvSpPr>
         <p:spPr>
           <a:xfrm>
-            <a:off x="822960" y="5532120"/>
-            <a:ext cx="10241280" cy="457200"/>
-          </a:xfrm>
-          <a:prstGeom prst="rect">
-            <a:avLst/>
-          </a:prstGeom>
-          <a:noFill/>
-          <a:ln/>
-        </p:spPr>
-        <p:txBody>
-          <a:bodyPr wrap="square" lIns="0" tIns="0" rIns="0" bIns="0" rtlCol="0" anchor="ctr"/>
+            <a:off x="822960" y="5486400"/>
+            <a:ext cx="10241280" cy="685800"/>
+          </a:xfrm>
+          <a:prstGeom prst="rect">
+            <a:avLst/>
+          </a:prstGeom>
+          <a:noFill/>
+          <a:ln/>
+        </p:spPr>
+        <p:txBody>
+          <a:bodyPr wrap="square" lIns="0" tIns="0" rIns="0" bIns="0" rtlCol="0" anchor="t"/>
           <a:lstStyle/>
           <a:p>
             <a:pPr indent="0" marL="0">
+              <a:lnSpc>
+                <a:spcPts val="1700"/>
+              </a:lnSpc>
               <a:buNone/>
             </a:pPr>
             <a:r>
@@ -5040,7 +5043,7 @@
                 <a:ea typeface="Arial" pitchFamily="34" charset="-122"/>
                 <a:cs typeface="Arial" pitchFamily="34" charset="-120"/>
               </a:rPr>
-              <a:t>Could your C1 product survive an oppositional reading? The room will not agree, and that disagreement is the theory working.</a:t>
+              <a:t>Run as Four Corners: dominant, negotiated, oppositional, plus an abstain-and-justify center. Could your C1 product survive an oppositional reading? The disagreement is the theory working.</a:t>
             </a:r>
             <a:endParaRPr lang="en-US" sz="1250" dirty="0"/>
           </a:p>
@@ -5181,7 +5184,7 @@
       </p:grpSpPr>
       <p:pic>
         <p:nvPicPr>
-          <p:cNvPr id="2" name="Image 0" descr="/private/tmp/claude-501/-Users-dogan-Documents-Vaults-Courses/a3a5132d-721f-4cd4-8ddd-e62e2b37b51b/scratchpad/img/crops/kasebier-portrait_a664.jpg">    </p:cNvPr>
+          <p:cNvPr id="2" name="Image 0" descr="/Users/dogan/Documents/Vaults/Courses/wiki/classes/media-studies/decks/_build/img/crops/kasebier-portrait_a664.jpg">    </p:cNvPr>
           <p:cNvPicPr>
             <a:picLocks noChangeAspect="1"/>
           </p:cNvPicPr>
